--- a/cylinder_re150/demo/ns_staggered_tutorial.pptx
+++ b/cylinder_re150/demo/ns_staggered_tutorial.pptx
@@ -3297,7 +3297,7 @@
         <p:spPr>
           <a:xfrm>
             <a:off x="8503920" y="411480"/>
-            <a:ext cx="2301362" cy="2377440"/>
+            <a:ext cx="2209434" cy="2377440"/>
           </a:xfrm>
           <a:prstGeom prst="rect">
             <a:avLst/>
@@ -3490,7 +3490,7 @@
         <p:spPr>
           <a:xfrm>
             <a:off x="548640" y="1143000"/>
-            <a:ext cx="5077305" cy="3931920"/>
+            <a:ext cx="4724968" cy="3931920"/>
           </a:xfrm>
           <a:prstGeom prst="rect">
             <a:avLst/>
@@ -4007,7 +4007,7 @@
                 </a:solidFill>
                 <a:latin typeface="Courier New"/>
               </a:rPr>
-              <a:t>cells (P locations)     : 37,044</a:t>
+              <a:t>cells (P locations)     : 26,444</a:t>
             </a:r>
           </a:p>
           <a:p>
@@ -4019,7 +4019,7 @@
                 </a:solidFill>
                 <a:latin typeface="Courier New"/>
               </a:rPr>
-              <a:t>faces (velocity locs)   : 74,603  (1,030 boundary, 73,573 interior)</a:t>
+              <a:t>faces (velocity locs)   : 53,286  (796 boundary, 52,490 interior)</a:t>
             </a:r>
           </a:p>
           <a:p>
@@ -4043,7 +4043,7 @@
                 </a:solidFill>
                 <a:latin typeface="Courier New"/>
               </a:rPr>
-              <a:t>    cylinder  152 faces   inlet  104   outlet  104   wall_bottom  335   wall_top  335</a:t>
+              <a:t>    cylinder  152 faces   inlet  120   outlet  120   wall_bottom  202   wall_top  202</a:t>
             </a:r>
           </a:p>
           <a:p>
@@ -5036,7 +5036,7 @@
                     <a:p>
                       <a:r>
                         <a:rPr sz="1100" b="0"/>
-                        <a:t>x_P — where p, u, v are stored  (Nc = 37,044)</a:t>
+                        <a:t>x_P — where p, u, v are stored  (Nc = 26,444)</a:t>
                       </a:r>
                     </a:p>
                   </a:txBody>
@@ -5118,7 +5118,7 @@
                     <a:p>
                       <a:r>
                         <a:rPr sz="1100" b="0"/>
-                        <a:t>x_f — where U_n is stored  (Nf = 74,603)</a:t>
+                        <a:t>x_f — where U_n is stored  (Nf = 53,286)</a:t>
                       </a:r>
                     </a:p>
                   </a:txBody>
@@ -5489,7 +5489,7 @@
                 </a:solidFill>
                 <a:latin typeface="Courier New"/>
               </a:rPr>
-              <a:t>interior = nei &gt;= 0                       # 73,573 True</a:t>
+              <a:t>interior = nei &gt;= 0                       # 52,490 True</a:t>
             </a:r>
           </a:p>
           <a:p>
@@ -5501,7 +5501,7 @@
                 </a:solidFill>
                 <a:latin typeface="Courier New"/>
               </a:rPr>
-              <a:t>bnd      = ~interior                      #  1,030 True</a:t>
+              <a:t>bnd      = ~interior                      #    796 True</a:t>
             </a:r>
           </a:p>
           <a:p>
@@ -5747,7 +5747,7 @@
         <p:spPr>
           <a:xfrm>
             <a:off x="548640" y="1143000"/>
-            <a:ext cx="6400800" cy="3068488"/>
+            <a:ext cx="6400800" cy="3099939"/>
           </a:xfrm>
           <a:prstGeom prst="rect">
             <a:avLst/>
@@ -6245,7 +6245,7 @@
                   <a:srgbClr val="444444"/>
                 </a:solidFill>
               </a:rPr>
-              <a:t>• The area formula is the divergence theorem applied to the vector field x (∇·x = 2) — a first check that the data structure is right: the areas must be positive and sum to the domain area 400 − π/4</a:t>
+              <a:t>• The area formula is the divergence theorem applied to the vector field x (∇·x = 2) — a first check that the data structure is right: the areas must be positive and sum to the domain area 24·12 − π/4 = 287.21</a:t>
             </a:r>
           </a:p>
           <a:p>
@@ -7296,7 +7296,7 @@
                   <a:srgbClr val="444444"/>
                 </a:solidFill>
               </a:rPr>
-              <a:t>• The same line of code updates all 37,044 cells at once: u_new = u + dt * rhs</a:t>
+              <a:t>• The same line of code updates all 26,444 cells at once: u_new = u + dt * rhs</a:t>
             </a:r>
           </a:p>
           <a:p>
@@ -7595,7 +7595,7 @@
                   <a:srgbClr val="444444"/>
                 </a:solidFill>
               </a:rPr>
-              <a:t>– on a body-fitted multiblock mesh (37,044 cells) with small cells on the walls and large cells far away</a:t>
+              <a:t>– on a body-fitted multiblock mesh (26,444 cells) with small cells on the walls and large cells far away</a:t>
             </a:r>
           </a:p>
           <a:p>
@@ -7610,7 +7610,7 @@
                   <a:srgbClr val="444444"/>
                 </a:solidFill>
               </a:rPr>
-              <a:t>– with checks: mass conservation to 1e-12, lift/drag history, Strouhal number ≈ 0.20</a:t>
+              <a:t>– with checks: mass conservation to 1e-12, lift/drag history, Strouhal number ≈ 0.21</a:t>
             </a:r>
           </a:p>
           <a:p>
@@ -10183,7 +10183,7 @@
                   <a:srgbClr val="444444"/>
                 </a:solidFill>
               </a:rPr>
-              <a:t>• Nc = 37,044 equations in 37,044 unknowns, each coupling a cell to its 4 neighbours → a sparse linear system A p = rhs</a:t>
+              <a:t>• Nc = 26,444 equations in 26,444 unknowns, each coupling a cell to its 4 neighbours → a sparse linear system A p = rhs</a:t>
             </a:r>
           </a:p>
         </p:txBody>
@@ -10670,7 +10670,7 @@
                     <a:p>
                       <a:r>
                         <a:rPr sz="1100" b="0"/>
-                        <a:t>37,044</a:t>
+                        <a:t>26,444</a:t>
                       </a:r>
                     </a:p>
                   </a:txBody>
@@ -10683,7 +10683,7 @@
                     <a:p>
                       <a:r>
                         <a:rPr sz="1100" b="0"/>
-                        <a:t>184,190</a:t>
+                        <a:t>131,424</a:t>
                       </a:r>
                     </a:p>
                   </a:txBody>
@@ -10696,7 +10696,7 @@
                     <a:p>
                       <a:r>
                         <a:rPr sz="1100" b="0"/>
-                        <a:t>2.2 MB</a:t>
+                        <a:t>1.7 MB</a:t>
                       </a:r>
                     </a:p>
                   </a:txBody>
@@ -11050,7 +11050,7 @@
                     <a:p>
                       <a:r>
                         <a:rPr sz="1100" b="1"/>
-                        <a:t>work per time step (37k cells)</a:t>
+                        <a:t>work per time step (26k cells)</a:t>
                       </a:r>
                     </a:p>
                   </a:txBody>
@@ -11158,7 +11158,7 @@
                     <a:p>
                       <a:r>
                         <a:rPr sz="1100" b="0"/>
-                        <a:t>≈ 1000 iterations, 390 ms</a:t>
+                        <a:t>≈ 1000 iterations, ~300 ms</a:t>
                       </a:r>
                     </a:p>
                   </a:txBody>
@@ -11736,7 +11736,7 @@
                     <a:p>
                       <a:r>
                         <a:rPr sz="1100" b="0"/>
-                        <a:t>inlet (x = −10)</a:t>
+                        <a:t>inlet (x = 0)</a:t>
                       </a:r>
                     </a:p>
                   </a:txBody>
@@ -11790,7 +11790,7 @@
                     <a:p>
                       <a:r>
                         <a:rPr sz="1100" b="0"/>
-                        <a:t>outlet (x = +30)</a:t>
+                        <a:t>outlet (x = 24)</a:t>
                       </a:r>
                     </a:p>
                   </a:txBody>
@@ -12488,7 +12488,7 @@
                   <a:srgbClr val="444444"/>
                 </a:solidFill>
               </a:rPr>
-              <a:t>• |u|_max ≈ 1.0 at the start, 1.58 during shedding → Δt stays between 0.0045 and 0.0047: adaptive in name, practically constant</a:t>
+              <a:t>• |u|_max ≈ 1.4 after the start, 1.5–1.6 during shedding → Δt stays between 0.0044 and 0.0047: adaptive in name, practically constant</a:t>
             </a:r>
           </a:p>
           <a:p>
@@ -12503,7 +12503,7 @@
                   <a:srgbClr val="444444"/>
                 </a:solidFill>
               </a:rPr>
-              <a:t>• Fine mesh: 26,600 steps to t = 120, ≈ 1,100 steps per shedding period. --dt fixes it by hand, --tau changes the margin</a:t>
+              <a:t>• Fine mesh: 25,700 steps to t = 120, ≈ 1,000 steps per shedding period. --dt fixes it by hand, --tau changes the margin</a:t>
             </a:r>
           </a:p>
         </p:txBody>
@@ -13637,7 +13637,7 @@
                   <a:srgbClr val="444444"/>
                 </a:solidFill>
               </a:rPr>
-              <a:t>• Problem we hit: the mesh is exactly mirror-symmetric about y = 0, and so is every operator. A symmetric start therefore stays symmetric forever in exact arithmetic — Cl printed as −0.000 for 120 time units while the wake grew into the long, steady (and unstable) symmetric bubble</a:t>
+              <a:t>• Problem we hit: the mesh is exactly mirror-symmetric about the cylinder centre-line y = y_c, and so is every operator. A symmetric start therefore stays symmetric forever in exact arithmetic — Cl printed as −0.000 for 120 time units while the wake grew into the long, steady (and unstable) symmetric bubble</a:t>
             </a:r>
           </a:p>
           <a:p>
@@ -13667,7 +13667,7 @@
                   <a:srgbClr val="444444"/>
                 </a:solidFill>
               </a:rPr>
-              <a:t>• Fix: add a small, localised, non-symmetric kick that the physics will amplify if shedding is real — a transverse velocity bump one diameter behind the cylinder, plus a 2-time-unit inlet pulse</a:t>
+              <a:t>• Fix: add a small, localised, non-symmetric kick that the physics will amplify if shedding is real — a transverse velocity bump one diameter behind the cylinder (at x_c + D, y_c), plus a 2-time-unit inlet pulse</a:t>
             </a:r>
           </a:p>
           <a:p>
@@ -13682,7 +13682,7 @@
                   <a:srgbClr val="444444"/>
                 </a:solidFill>
               </a:rPr>
-              <a:t>• With it, shedding is established by tU/D ≈ 20–30 (right plot). The seed is washed out within a few time units; both runs end on the same limit cycle (Cl = ±0.75). That is the test that the seed only triggered, and did not create, the oscillation</a:t>
+              <a:t>• With it, shedding is established by tU/D ≈ 20–30 (right plot). The seed is washed out within a few time units; both runs end on the same limit cycle (Cl = ±0.75 on that domain). That is the test that the seed only triggered, and did not create, the oscillation</a:t>
             </a:r>
           </a:p>
         </p:txBody>
@@ -13736,7 +13736,7 @@
                 </a:solidFill>
                 <a:latin typeface="Courier New"/>
               </a:rPr>
-              <a:t>r2 = (P[:, 0] - 1.0)**2 + P[:, 1]**2</a:t>
+              <a:t>r2 = (P[:, 0] - (xc + D))**2 + (P[:, 1] - yc)**2</a:t>
             </a:r>
           </a:p>
           <a:p>
@@ -13767,7 +13767,7 @@
       </p:sp>
       <p:pic>
         <p:nvPicPr>
-          <p:cNvPr id="7" name="Picture 6" descr="forces_central_fine.png"/>
+          <p:cNvPr id="7" name="Picture 6" descr="forces_noseed_40x10.png"/>
           <p:cNvPicPr>
             <a:picLocks noChangeAspect="1"/>
           </p:cNvPicPr>
@@ -13791,7 +13791,7 @@
       </p:pic>
       <p:pic>
         <p:nvPicPr>
-          <p:cNvPr id="8" name="Picture 7" descr="forces_central_fine_default_run.png"/>
+          <p:cNvPr id="8" name="Picture 7" descr="forces_seed_40x10.png"/>
           <p:cNvPicPr>
             <a:picLocks noChangeAspect="1"/>
           </p:cNvPicPr>
@@ -13841,7 +13841,7 @@
                   <a:srgbClr val="444444"/>
                 </a:solidFill>
               </a:rPr>
-              <a:t>no seed (--perturb 0): onset at t ≈ 120</a:t>
+              <a:t>no seed (--perturb 0): onset at t ≈ 120   [earlier 40 D × 10 D domain]</a:t>
             </a:r>
           </a:p>
         </p:txBody>
@@ -13874,7 +13874,7 @@
                   <a:srgbClr val="444444"/>
                 </a:solidFill>
               </a:rPr>
-              <a:t>seed 0.1 (default): onset at t ≈ 20, same final amplitude</a:t>
+              <a:t>seed 0.1: onset at t ≈ 20, same final amplitude   [same domain]</a:t>
             </a:r>
           </a:p>
         </p:txBody>
@@ -15339,7 +15339,7 @@
                   <a:srgbClr val="B23A2A"/>
                 </a:solidFill>
               </a:rPr>
-              <a:t>• 26,644 steps to t = 120 → 5.6 min</a:t>
+              <a:t>• 25,725 steps to t = 120 → 5.6 min</a:t>
             </a:r>
           </a:p>
           <a:p>
@@ -16967,7 +16967,7 @@
                 </a:solidFill>
                 <a:latin typeface="Courier New"/>
               </a:rPr>
-              <a:t>cells    : 37,044   faces: 74,603   hmin=0.01774</a:t>
+              <a:t>cells    : 26,444   faces: 53,286   hmin=0.01774</a:t>
             </a:r>
           </a:p>
           <a:p>
@@ -17027,7 +17027,7 @@
                 </a:solidFill>
                 <a:latin typeface="Courier New"/>
               </a:rPr>
-              <a:t>step     1  t=0.0035  dt=0.003533  g=0.000  max|div|=3.959e-10  max|u|=1.954  Cd=453.7  Cl=-8.78</a:t>
+              <a:t>step     1  t=0.0047  dt=0.004719  g=0.000  max|div|=5.3e-12    max|u|=1.87   Cd=320.1  Cl=-6.3</a:t>
             </a:r>
           </a:p>
           <a:p>
@@ -17039,7 +17039,7 @@
                 </a:solidFill>
                 <a:latin typeface="Courier New"/>
               </a:rPr>
-              <a:t>step  1980  t=9.1894  dt=0.004719  g=0.000  max|div|=1.2e-12    max|u|=1.316  Cd=1.285  Cl=+0.193</a:t>
+              <a:t>step  1500  t=6.9399  dt=0.004719  g=0.000  max|div|=4.6e-12    max|u|=1.396  Cd=1.262  Cl=-0.100</a:t>
             </a:r>
           </a:p>
           <a:p>
@@ -17051,7 +17051,7 @@
                 </a:solidFill>
                 <a:latin typeface="Courier New"/>
               </a:rPr>
-              <a:t>step  9980  t=44.964  dt=0.004511  g=0.000  max|div|=1.8e-12    max|u|=1.573  Cd=1.679  Cl=-0.614</a:t>
+              <a:t>step  5840  t=27.199  dt=0.004438  g=0.000  max|div|=7.9e-12    max|u|=1.600  Cd=1.556  Cl=+0.594</a:t>
             </a:r>
           </a:p>
           <a:p>
@@ -17063,7 +17063,7 @@
                 </a:solidFill>
                 <a:latin typeface="Courier New"/>
               </a:rPr>
-              <a:t>step 26644  t=120.00  dt=0.004504  g=0.000  max|div|=1.9e-12    max|u|=1.574  Cd=1.642  Cl=+0.651</a:t>
+              <a:t>step 25725  t=120.00  dt=0.004673  g=0.000  max|div|=7.8e-12    max|u|=1.519  Cd=1.533  Cl=+0.066</a:t>
             </a:r>
           </a:p>
           <a:p>
@@ -17087,7 +17087,7 @@
                 </a:solidFill>
                 <a:latin typeface="Courier New"/>
               </a:rPr>
-              <a:t>done in 335.6s  (12.6 ms/step)  t=120.003</a:t>
+              <a:t>done in 335.1s  (13.0 ms/step)  t=120.005</a:t>
             </a:r>
           </a:p>
           <a:p>
@@ -17099,7 +17099,7 @@
                 </a:solidFill>
                 <a:latin typeface="Courier New"/>
               </a:rPr>
-              <a:t>forces   : Cd_mean=1.643  Cl_amp=0.751  St=0.213 (ref ~0.18)</a:t>
+              <a:t>forces   : Cd_mean=1.564  Cl_amp=0.712  St=0.207 (ref ~0.18)</a:t>
             </a:r>
           </a:p>
           <a:p>
@@ -17111,7 +17111,7 @@
                 </a:solidFill>
                 <a:latin typeface="Courier New"/>
               </a:rPr>
-              <a:t>wrote output_ns/cylinder_wake_central.gif  (45 of 266 frames, 6.7 MB)</a:t>
+              <a:t>wrote output_ns/cylinder_wake_central.gif  (44 of 44 frames, 5.6 MB)</a:t>
             </a:r>
           </a:p>
         </p:txBody>
@@ -17296,7 +17296,7 @@
                     <a:p>
                       <a:r>
                         <a:rPr sz="1000" b="0"/>
-                        <a:t>1e-12 (lu); 1e-8 (cg)</a:t>
+                        <a:t>~1e-11 (lu); 1e-8 (cg)</a:t>
                       </a:r>
                     </a:p>
                   </a:txBody>
@@ -17337,7 +17337,7 @@
                     <a:p>
                       <a:r>
                         <a:rPr sz="1000" b="0"/>
-                        <a:t>≈ 1.3 steady wake, ≈ 1.6 while shedding; growing without bound = instability</a:t>
+                        <a:t>≈ 1.4 steady wake, ≈ 1.5–1.6 while shedding; growing without bound = instability</a:t>
                       </a:r>
                     </a:p>
                   </a:txBody>
@@ -17609,7 +17609,7 @@
                     <a:p>
                       <a:r>
                         <a:rPr sz="1100" b="0"/>
-                        <a:t>two-panel snapshot: vorticity and u − U∞ with arrows</a:t>
+                        <a:t>two panels: 'Vorticity plot' (ω_z) and 'Velocity plot' (|u| with arrows)</a:t>
                       </a:r>
                     </a:p>
                   </a:txBody>
@@ -17732,7 +17732,7 @@
                     <a:p>
                       <a:r>
                         <a:rPr sz="1100" b="0"/>
-                        <a:t>final u − U∞ field and max|div|(t) on a log scale</a:t>
+                        <a:t>final Velocity plot and max|div|(t) on a log scale</a:t>
                       </a:r>
                     </a:p>
                   </a:txBody>
@@ -18572,7 +18572,7 @@
                     <a:p>
                       <a:r>
                         <a:rPr sz="1100" b="0"/>
-                        <a:t>vol.sum() vs 400 − π/4</a:t>
+                        <a:t>vol.sum() vs 24·12 − π/4 = 287.21</a:t>
                       </a:r>
                     </a:p>
                   </a:txBody>
@@ -19069,7 +19069,7 @@
       </p:sp>
       <p:pic>
         <p:nvPicPr>
-          <p:cNvPr id="5" name="Picture 4" descr="forces_central_fine_default_run.png"/>
+          <p:cNvPr id="5" name="Picture 4" descr="forces_griebel_fine.png"/>
           <p:cNvPicPr>
             <a:picLocks noChangeAspect="1"/>
           </p:cNvPicPr>
@@ -19190,7 +19190,7 @@
                     <a:p>
                       <a:r>
                         <a:rPr sz="1000" b="0"/>
-                        <a:t>0.20–0.21</a:t>
+                        <a:t>0.207</a:t>
                       </a:r>
                     </a:p>
                   </a:txBody>
@@ -19216,7 +19216,7 @@
                     <a:p>
                       <a:r>
                         <a:rPr sz="1000" b="0"/>
-                        <a:t>10 % blockage raises St; 1st-order time</a:t>
+                        <a:t>8.3 % blockage raises St; 1st-order time</a:t>
                       </a:r>
                     </a:p>
                   </a:txBody>
@@ -19244,7 +19244,7 @@
                     <a:p>
                       <a:r>
                         <a:rPr sz="1000" b="0"/>
-                        <a:t>1.64</a:t>
+                        <a:t>1.56</a:t>
                       </a:r>
                     </a:p>
                   </a:txBody>
@@ -19298,7 +19298,7 @@
                     <a:p>
                       <a:r>
                         <a:rPr sz="1000" b="0"/>
-                        <a:t>0.75</a:t>
+                        <a:t>0.71</a:t>
                       </a:r>
                     </a:p>
                   </a:txBody>
@@ -19506,7 +19506,7 @@
                   <a:srgbClr val="444444"/>
                 </a:solidFill>
               </a:rPr>
-              <a:t>• Physical? The qualitative picture (alternating street, St ≈ 0.2, Cd ≈ 1.3–1.6, Cd at 2f) is right; the quantitative gaps are explained by the 10 D channel height and first-order Euler — both deliberate simplifications of the setup, not bugs</a:t>
+              <a:t>• Physical? The qualitative picture (alternating street, St ≈ 0.2, Cd ≈ 1.3–1.6, Cd at 2f) is right; the quantitative gaps are explained by the 12 D channel height and first-order Euler — both deliberate simplifications of the setup, not bugs</a:t>
             </a:r>
           </a:p>
           <a:p>
@@ -19521,7 +19521,7 @@
                   <a:srgbClr val="444444"/>
                 </a:solidFill>
               </a:rPr>
-              <a:t>• To compare with the literature properly: widen the channel to ±15 D (blockage 3 %) and refine the far field</a:t>
+              <a:t>• To compare with the literature properly: widen the channel to 30 D (blockage 3 %) and refine the far field</a:t>
             </a:r>
           </a:p>
         </p:txBody>
@@ -19894,7 +19894,7 @@
                 </a:solidFill>
                 <a:latin typeface="Courier New"/>
               </a:rPr>
-              <a:t>    _draw_field(ax0, solver, solver.vorticity(), vlim=3.0, quiver=False)   # top</a:t>
+              <a:t>    _draw_vorticity(ax0, solver);  ax0.set_title("Vorticity plot")          # top</a:t>
             </a:r>
           </a:p>
           <a:p>
@@ -19906,7 +19906,7 @@
                 </a:solidFill>
                 <a:latin typeface="Courier New"/>
               </a:rPr>
-              <a:t>    _draw_field(ax1, solver, solver.u - solver.U_inf, vlim=0.8)           # bottom</a:t>
+              <a:t>    _draw_velocity(ax1, solver, vmax=1.6);  ax1.set_title("Velocity plot")  # bottom: |u|</a:t>
             </a:r>
           </a:p>
           <a:p>
@@ -20040,7 +20040,7 @@
                   <a:srgbClr val="444444"/>
                 </a:solidFill>
               </a:rPr>
-              <a:t>• Colour: every mesh cell is filled with its own value at this instant — vorticity ω_z = ∂v/∂x − ∂u/∂y (top; red/blue = the two senses of rotation) and u − U∞ (bottom; free stream white, wake blue, shoulders red)</a:t>
+              <a:t>• Colour: every mesh cell is filled with its own value at this instant — 'Vorticity plot': ω_z = ∂v/∂x − ∂u/∂y (red/blue = the two senses of rotation); 'Velocity plot': the speed |u| = √(u²+v²) (free stream ≈ 1, wake dark, shoulders bright). Titles and colour-bar labels carry only the plot type</a:t>
             </a:r>
           </a:p>
           <a:p>
@@ -20107,7 +20107,7 @@
         <p:spPr>
           <a:xfrm>
             <a:off x="7315200" y="1188720"/>
-            <a:ext cx="4956780" cy="5120640"/>
+            <a:ext cx="4758781" cy="5120640"/>
           </a:xfrm>
           <a:prstGeom prst="rect">
             <a:avLst/>
@@ -20321,7 +20321,7 @@
                   <a:srgbClr val="444444"/>
                 </a:solidFill>
               </a:rPr>
-              <a:t>• Left: the recirculating wake (u − U∞ ≈ −1 means fluid moving backwards) is pulled to one side — this frame is at a lift maximum</a:t>
+              <a:t>• Left: the recirculating wake (|u| ≈ 0, dark) is pulled to one side — this frame is at a lift maximum</a:t>
             </a:r>
           </a:p>
           <a:p>
@@ -21746,7 +21746,7 @@
                     <a:p>
                       <a:r>
                         <a:rPr sz="1100" b="0"/>
-                        <a:t>edit MESH_PRESETS: y_min=-15, y_max=15</a:t>
+                        <a:t>edit INPUT: y_max=30, yc=15 (30 D high)</a:t>
                       </a:r>
                     </a:p>
                   </a:txBody>
@@ -21800,7 +21800,7 @@
                     <a:p>
                       <a:r>
                         <a:rPr sz="1100" b="0"/>
-                        <a:t>edit _wake_field to return p</a:t>
+                        <a:t>edit _draw_velocity to colour by p</a:t>
                       </a:r>
                     </a:p>
                   </a:txBody>
@@ -22607,8 +22607,8 @@
         </p:blipFill>
         <p:spPr>
           <a:xfrm>
-            <a:off x="548640" y="1143000"/>
-            <a:ext cx="7498079" cy="2416048"/>
+            <a:off x="548640" y="1097280"/>
+            <a:ext cx="6404882" cy="2743200"/>
           </a:xfrm>
           <a:prstGeom prst="rect">
             <a:avLst/>
@@ -22623,8 +22623,8 @@
         </p:nvSpPr>
         <p:spPr>
           <a:xfrm>
-            <a:off x="548640" y="3657600"/>
-            <a:ext cx="11064240" cy="2743200"/>
+            <a:off x="548640" y="3931920"/>
+            <a:ext cx="11064240" cy="2468880"/>
           </a:xfrm>
           <a:prstGeom prst="rect">
             <a:avLst/>
@@ -22639,7 +22639,7 @@
           <a:p>
             <a:pPr>
               <a:spcAft>
-                <a:spcPts val="500"/>
+                <a:spcPts val="300"/>
               </a:spcAft>
             </a:pPr>
             <a:r>
@@ -22648,13 +22648,13 @@
                   <a:srgbClr val="444444"/>
                 </a:solidFill>
               </a:rPr>
-              <a:t>• A long channel, 40 D long and 10 D high, with a cylinder of diameter D one quarter of the way in</a:t>
+              <a:t>• A channel 24 D long and 12 D high, with a cylinder of diameter D centred at (6 D, 6 D) — 6 D from the inlet, mid-height</a:t>
             </a:r>
           </a:p>
           <a:p>
             <a:pPr>
               <a:spcAft>
-                <a:spcPts val="500"/>
+                <a:spcPts val="300"/>
               </a:spcAft>
             </a:pPr>
             <a:r>
@@ -22663,13 +22663,13 @@
                   <a:srgbClr val="444444"/>
                 </a:solidFill>
               </a:rPr>
-              <a:t>• Fluid enters from the left at speed U∞, leaves on the right, cannot slip on the top/bottom walls or the cylinder</a:t>
+              <a:t>• Fluid enters from the left (x = 0) at speed U∞, leaves on the right (x = 24), cannot slip on the top/bottom walls (y = 0, 12) or the cylinder</a:t>
             </a:r>
           </a:p>
           <a:p>
             <a:pPr>
               <a:spcAft>
-                <a:spcPts val="500"/>
+                <a:spcPts val="300"/>
               </a:spcAft>
             </a:pPr>
             <a:r>
@@ -22684,7 +22684,7 @@
           <a:p>
             <a:pPr>
               <a:spcAft>
-                <a:spcPts val="500"/>
+                <a:spcPts val="300"/>
               </a:spcAft>
             </a:pPr>
             <a:r>
@@ -22699,7 +22699,7 @@
           <a:p>
             <a:pPr>
               <a:spcAft>
-                <a:spcPts val="500"/>
+                <a:spcPts val="300"/>
               </a:spcAft>
             </a:pPr>
             <a:r>
@@ -22714,7 +22714,7 @@
           <a:p>
             <a:pPr lvl="1">
               <a:spcAft>
-                <a:spcPts val="500"/>
+                <a:spcPts val="300"/>
               </a:spcAft>
             </a:pPr>
             <a:r>
@@ -22729,7 +22729,7 @@
           <a:p>
             <a:pPr lvl="1">
               <a:spcAft>
-                <a:spcPts val="500"/>
+                <a:spcPts val="300"/>
               </a:spcAft>
             </a:pPr>
             <a:r>
@@ -22744,7 +22744,7 @@
           <a:p>
             <a:pPr lvl="1">
               <a:spcAft>
-                <a:spcPts val="500"/>
+                <a:spcPts val="300"/>
               </a:spcAft>
             </a:pPr>
             <a:r>
@@ -22753,7 +22753,7 @@
                   <a:srgbClr val="444444"/>
                 </a:solidFill>
               </a:rPr>
-              <a:t>– our channel is only 10 D high (10 % blockage) → expect St and Cd a little higher than these</a:t>
+              <a:t>– our channel is only 12 D high (8.3 % blockage) → expect St and Cd a little higher than these</a:t>
             </a:r>
           </a:p>
         </p:txBody>
@@ -22766,8 +22766,8 @@
         </p:nvSpPr>
         <p:spPr>
           <a:xfrm>
-            <a:off x="8321040" y="1371600"/>
-            <a:ext cx="3474720" cy="914400"/>
+            <a:off x="7680960" y="1371600"/>
+            <a:ext cx="4114800" cy="914400"/>
           </a:xfrm>
           <a:prstGeom prst="rect">
             <a:avLst/>
@@ -24205,7 +24205,7 @@
                   <a:srgbClr val="444444"/>
                 </a:solidFill>
               </a:rPr>
-              <a:t>• To resolve it we need cells of about 0.015 D there. A uniform 0.015 grid over 40 D × 10 D is 1.8 million cells — and Δt would be tiny everywhere</a:t>
+              <a:t>• To resolve it we need cells of about 0.015 D there. A uniform 0.015 grid over 24 D × 12 D is 1.3 million cells — and Δt would be tiny everywhere</a:t>
             </a:r>
           </a:p>
           <a:p>
@@ -24919,7 +24919,7 @@
                     <a:p>
                       <a:r>
                         <a:rPr sz="1100" b="0"/>
-                        <a:t>6,630</a:t>
+                        <a:t>4,848</a:t>
                       </a:r>
                     </a:p>
                   </a:txBody>
@@ -25012,7 +25012,7 @@
                     <a:p>
                       <a:r>
                         <a:rPr sz="1100" b="0"/>
-                        <a:t>37,044</a:t>
+                        <a:t>26,444</a:t>
                       </a:r>
                     </a:p>
                   </a:txBody>
@@ -25051,7 +25051,7 @@
                     <a:p>
                       <a:r>
                         <a:rPr sz="1100" b="0"/>
-                        <a:t>vortex shedding (this deck), ~6 min</a:t>
+                        <a:t>vortex shedding (this deck), ~5 min</a:t>
                       </a:r>
                     </a:p>
                   </a:txBody>
@@ -25105,7 +25105,7 @@
                     <a:p>
                       <a:r>
                         <a:rPr sz="1100" b="0"/>
-                        <a:t>132,870</a:t>
+                        <a:t>~95,000</a:t>
                       </a:r>
                     </a:p>
                   </a:txBody>

--- a/cylinder_re150/demo/ns_staggered_tutorial.pptx
+++ b/cylinder_re150/demo/ns_staggered_tutorial.pptx
@@ -23035,7 +23035,7 @@
                     <a:p>
                       <a:r>
                         <a:rPr sz="1200" b="0"/>
-                        <a:t>solver: load_staggered, build_topology, GriebelStaggeredNS (step, _project_Un, …), plotting, CLI</a:t>
+                        <a:t>solver: load_staggered, build_topology, GriebelStaggeredNS (step, _project_Un, …), plotting, save_wake_gif, CLI</a:t>
                       </a:r>
                     </a:p>
                   </a:txBody>
@@ -23050,7 +23050,7 @@
                     <a:p>
                       <a:r>
                         <a:rPr sz="1200" b="0"/>
-                        <a:t>cylinder_re150/viz.py</a:t>
+                        <a:t>cylinder_re150/tools/compare_nasa.py</a:t>
                       </a:r>
                     </a:p>
                   </a:txBody>
@@ -23063,7 +23063,7 @@
                     <a:p>
                       <a:r>
                         <a:rPr sz="1200" b="0"/>
-                        <a:t>save_wake_gif (frames → palette GIF)</a:t>
+                        <a:t>post-processing: Cd, Cl, St against the NASA Study #1 reference (VALIDATION_NASA.md)</a:t>
                       </a:r>
                     </a:p>
                   </a:txBody>
